--- a/generated/Tier 1 Broker Scorecards/Partlow Insurance Agency Inc_Broker_Scorecard.pptx
+++ b/generated/Tier 1 Broker Scorecards/Partlow Insurance Agency Inc_Broker_Scorecard.pptx
@@ -3394,7 +3394,7 @@
                         <a:rPr sz="900">
                           <a:latin typeface="Segoe UI"/>
                         </a:rPr>
-                        <a:t>Tier 1  |  6.37% / 15.00%</a:t>
+                        <a:t>Tier 1  |  6.33% / 15.00%</a:t>
                       </a:r>
                     </a:p>
                   </a:txBody>
@@ -3766,7 +3766,7 @@
                         <a:rPr sz="900">
                           <a:latin typeface="Segoe UI"/>
                         </a:rPr>
-                        <a:t>Non-Fleet Subs: 145  |  Binds: 8</a:t>
+                        <a:t>Non-Fleet Subs: 146  |  Binds: 8</a:t>
                       </a:r>
                     </a:p>
                   </a:txBody>
@@ -4428,7 +4428,7 @@
                           </a:solidFill>
                           <a:latin typeface="Segoe UI"/>
                         </a:rPr>
-                        <a:t>32</a:t>
+                        <a:t>33</a:t>
                       </a:r>
                     </a:p>
                   </a:txBody>
@@ -4707,7 +4707,7 @@
                           </a:solidFill>
                           <a:latin typeface="Segoe UI"/>
                         </a:rPr>
-                        <a:t>9.4%</a:t>
+                        <a:t>9.1%</a:t>
                       </a:r>
                     </a:p>
                   </a:txBody>

--- a/generated/Tier 1 Broker Scorecards/Partlow Insurance Agency Inc_Broker_Scorecard.pptx
+++ b/generated/Tier 1 Broker Scorecards/Partlow Insurance Agency Inc_Broker_Scorecard.pptx
@@ -3394,7 +3394,7 @@
                         <a:rPr sz="900">
                           <a:latin typeface="Segoe UI"/>
                         </a:rPr>
-                        <a:t>Tier 1  |  6.33% / 15.00%</a:t>
+                        <a:t>Tier 1  |  6.29% / 15.00%</a:t>
                       </a:r>
                     </a:p>
                   </a:txBody>
@@ -3766,7 +3766,7 @@
                         <a:rPr sz="900">
                           <a:latin typeface="Segoe UI"/>
                         </a:rPr>
-                        <a:t>Non-Fleet Subs: 146  |  Binds: 8</a:t>
+                        <a:t>Non-Fleet Subs: 147  |  Binds: 8</a:t>
                       </a:r>
                     </a:p>
                   </a:txBody>
@@ -4428,7 +4428,7 @@
                           </a:solidFill>
                           <a:latin typeface="Segoe UI"/>
                         </a:rPr>
-                        <a:t>33</a:t>
+                        <a:t>34</a:t>
                       </a:r>
                     </a:p>
                   </a:txBody>
@@ -4707,7 +4707,7 @@
                           </a:solidFill>
                           <a:latin typeface="Segoe UI"/>
                         </a:rPr>
-                        <a:t>9.1%</a:t>
+                        <a:t>8.8%</a:t>
                       </a:r>
                     </a:p>
                   </a:txBody>

--- a/generated/Tier 1 Broker Scorecards/Partlow Insurance Agency Inc_Broker_Scorecard.pptx
+++ b/generated/Tier 1 Broker Scorecards/Partlow Insurance Agency Inc_Broker_Scorecard.pptx
@@ -3357,7 +3357,7 @@
                         <a:rPr sz="800">
                           <a:latin typeface="Segoe UI"/>
                         </a:rPr>
-                        <a:t>$842,178.38 / $825,710.80 / $283,443.30</a:t>
+                        <a:t>$842,178.38 / $831,586.11 / $289,318.61</a:t>
                       </a:r>
                     </a:p>
                   </a:txBody>
@@ -3394,7 +3394,7 @@
                         <a:rPr sz="900">
                           <a:latin typeface="Segoe UI"/>
                         </a:rPr>
-                        <a:t>Tier 1  |  6.29% / 15.00%</a:t>
+                        <a:t>Tier 1  |  6.17% / 15.00%</a:t>
                       </a:r>
                     </a:p>
                   </a:txBody>
@@ -3431,7 +3431,7 @@
                         <a:rPr sz="900">
                           <a:latin typeface="Segoe UI"/>
                         </a:rPr>
-                        <a:t>$1,179,049.73  (24.0% achieved)</a:t>
+                        <a:t>$1,179,049.73  (24.5% achieved)</a:t>
                       </a:r>
                     </a:p>
                   </a:txBody>
@@ -3690,7 +3690,7 @@
                         <a:rPr sz="900">
                           <a:latin typeface="Segoe UI"/>
                         </a:rPr>
-                        <a:t>Fleet Bound Premium: $120,400.42</a:t>
+                        <a:t>Fleet Bound Premium: $122,893.40</a:t>
                       </a:r>
                     </a:p>
                   </a:txBody>
@@ -3766,7 +3766,7 @@
                         <a:rPr sz="900">
                           <a:latin typeface="Segoe UI"/>
                         </a:rPr>
-                        <a:t>Non-Fleet Subs: 147  |  Binds: 8</a:t>
+                        <a:t>Non-Fleet Subs: 150  |  Binds: 8</a:t>
                       </a:r>
                     </a:p>
                   </a:txBody>
@@ -3803,7 +3803,7 @@
                         <a:rPr sz="900">
                           <a:latin typeface="Segoe UI"/>
                         </a:rPr>
-                        <a:t>Non-Fleet Bound Premium: $163,042.88</a:t>
+                        <a:t>Non-Fleet Bound Premium: $166,425.21</a:t>
                       </a:r>
                     </a:p>
                   </a:txBody>
@@ -4428,7 +4428,7 @@
                           </a:solidFill>
                           <a:latin typeface="Segoe UI"/>
                         </a:rPr>
-                        <a:t>34</a:t>
+                        <a:t>38</a:t>
                       </a:r>
                     </a:p>
                   </a:txBody>
@@ -4707,7 +4707,7 @@
                           </a:solidFill>
                           <a:latin typeface="Segoe UI"/>
                         </a:rPr>
-                        <a:t>8.8%</a:t>
+                        <a:t>10.5%</a:t>
                       </a:r>
                     </a:p>
                   </a:txBody>
@@ -4983,7 +4983,7 @@
                           </a:solidFill>
                           <a:latin typeface="Segoe UI"/>
                         </a:rPr>
-                        <a:t>3</a:t>
+                        <a:t>4</a:t>
                       </a:r>
                     </a:p>
                   </a:txBody>
@@ -5262,7 +5262,7 @@
                           </a:solidFill>
                           <a:latin typeface="Segoe UI"/>
                         </a:rPr>
-                        <a:t>$75.1K</a:t>
+                        <a:t>$81.0K</a:t>
                       </a:r>
                     </a:p>
                   </a:txBody>

--- a/generated/Tier 1 Broker Scorecards/Partlow Insurance Agency Inc_Broker_Scorecard.pptx
+++ b/generated/Tier 1 Broker Scorecards/Partlow Insurance Agency Inc_Broker_Scorecard.pptx
@@ -3357,7 +3357,7 @@
                         <a:rPr sz="800">
                           <a:latin typeface="Segoe UI"/>
                         </a:rPr>
-                        <a:t>$842,178.38 / $831,586.11 / $289,318.61</a:t>
+                        <a:t>$842,178.38 / $831,774.81 / $289,507.31</a:t>
                       </a:r>
                     </a:p>
                   </a:txBody>
@@ -3394,7 +3394,7 @@
                         <a:rPr sz="900">
                           <a:latin typeface="Segoe UI"/>
                         </a:rPr>
-                        <a:t>Tier 1  |  6.17% / 15.00%</a:t>
+                        <a:t>Tier 1  |  6.75% / 15.00%</a:t>
                       </a:r>
                     </a:p>
                   </a:txBody>
@@ -3431,7 +3431,7 @@
                         <a:rPr sz="900">
                           <a:latin typeface="Segoe UI"/>
                         </a:rPr>
-                        <a:t>$1,179,049.73  (24.5% achieved)</a:t>
+                        <a:t>$1,179,049.73  (24.6% achieved)</a:t>
                       </a:r>
                     </a:p>
                   </a:txBody>
@@ -3653,7 +3653,7 @@
                         <a:rPr sz="900">
                           <a:latin typeface="Segoe UI"/>
                         </a:rPr>
-                        <a:t>Fleet Subs: 12  |  Binds: 2</a:t>
+                        <a:t>Fleet Subs: 13  |  Binds: 2</a:t>
                       </a:r>
                     </a:p>
                   </a:txBody>
@@ -3690,7 +3690,7 @@
                         <a:rPr sz="900">
                           <a:latin typeface="Segoe UI"/>
                         </a:rPr>
-                        <a:t>Fleet Bound Premium: $122,893.40</a:t>
+                        <a:t>Fleet Bound Premium: $107,554.23</a:t>
                       </a:r>
                     </a:p>
                   </a:txBody>
@@ -3727,7 +3727,7 @@
                         <a:rPr sz="900">
                           <a:latin typeface="Segoe UI"/>
                         </a:rPr>
-                        <a:t>Fleet Book %: 42.5%</a:t>
+                        <a:t>Fleet Book %: 37.2%</a:t>
                       </a:r>
                     </a:p>
                   </a:txBody>
@@ -3766,7 +3766,7 @@
                         <a:rPr sz="900">
                           <a:latin typeface="Segoe UI"/>
                         </a:rPr>
-                        <a:t>Non-Fleet Subs: 150  |  Binds: 8</a:t>
+                        <a:t>Non-Fleet Subs: 150  |  Binds: 9</a:t>
                       </a:r>
                     </a:p>
                   </a:txBody>
@@ -3803,7 +3803,7 @@
                         <a:rPr sz="900">
                           <a:latin typeface="Segoe UI"/>
                         </a:rPr>
-                        <a:t>Non-Fleet Bound Premium: $166,425.21</a:t>
+                        <a:t>Non-Fleet Bound Premium: $181,953.08</a:t>
                       </a:r>
                     </a:p>
                   </a:txBody>
@@ -3840,7 +3840,7 @@
                         <a:rPr sz="900">
                           <a:latin typeface="Segoe UI"/>
                         </a:rPr>
-                        <a:t>Non-Fleet Book %: 57.5%</a:t>
+                        <a:t>Non-Fleet Book %: 62.8%</a:t>
                       </a:r>
                     </a:p>
                   </a:txBody>
@@ -4428,7 +4428,7 @@
                           </a:solidFill>
                           <a:latin typeface="Segoe UI"/>
                         </a:rPr>
-                        <a:t>38</a:t>
+                        <a:t>39</a:t>
                       </a:r>
                     </a:p>
                   </a:txBody>
@@ -4707,7 +4707,7 @@
                           </a:solidFill>
                           <a:latin typeface="Segoe UI"/>
                         </a:rPr>
-                        <a:t>10.5%</a:t>
+                        <a:t>12.8%</a:t>
                       </a:r>
                     </a:p>
                   </a:txBody>
@@ -4983,7 +4983,7 @@
                           </a:solidFill>
                           <a:latin typeface="Segoe UI"/>
                         </a:rPr>
-                        <a:t>4</a:t>
+                        <a:t>5</a:t>
                       </a:r>
                     </a:p>
                   </a:txBody>
@@ -5262,7 +5262,7 @@
                           </a:solidFill>
                           <a:latin typeface="Segoe UI"/>
                         </a:rPr>
-                        <a:t>$81.0K</a:t>
+                        <a:t>$81.2K</a:t>
                       </a:r>
                     </a:p>
                   </a:txBody>

--- a/generated/Tier 1 Broker Scorecards/Partlow Insurance Agency Inc_Broker_Scorecard.pptx
+++ b/generated/Tier 1 Broker Scorecards/Partlow Insurance Agency Inc_Broker_Scorecard.pptx
@@ -3357,7 +3357,7 @@
                         <a:rPr sz="800">
                           <a:latin typeface="Segoe UI"/>
                         </a:rPr>
-                        <a:t>$842,178.38 / $831,774.81 / $289,507.31</a:t>
+                        <a:t>$842,178.38 / $832,920.03 / $290,652.53</a:t>
                       </a:r>
                     </a:p>
                   </a:txBody>
@@ -3394,7 +3394,7 @@
                         <a:rPr sz="900">
                           <a:latin typeface="Segoe UI"/>
                         </a:rPr>
-                        <a:t>Tier 1  |  6.75% / 15.00%</a:t>
+                        <a:t>Tier 1  |  7.36% / 15.00%</a:t>
                       </a:r>
                     </a:p>
                   </a:txBody>
@@ -3431,7 +3431,7 @@
                         <a:rPr sz="900">
                           <a:latin typeface="Segoe UI"/>
                         </a:rPr>
-                        <a:t>$1,179,049.73  (24.6% achieved)</a:t>
+                        <a:t>$1,179,049.73  (24.7% achieved)</a:t>
                       </a:r>
                     </a:p>
                   </a:txBody>
@@ -3653,7 +3653,7 @@
                         <a:rPr sz="900">
                           <a:latin typeface="Segoe UI"/>
                         </a:rPr>
-                        <a:t>Fleet Subs: 13  |  Binds: 2</a:t>
+                        <a:t>Fleet Subs: 13  |  Binds: 3</a:t>
                       </a:r>
                     </a:p>
                   </a:txBody>
@@ -3690,7 +3690,7 @@
                         <a:rPr sz="900">
                           <a:latin typeface="Segoe UI"/>
                         </a:rPr>
-                        <a:t>Fleet Bound Premium: $107,554.23</a:t>
+                        <a:t>Fleet Bound Premium: $134,149.64</a:t>
                       </a:r>
                     </a:p>
                   </a:txBody>
@@ -3727,7 +3727,7 @@
                         <a:rPr sz="900">
                           <a:latin typeface="Segoe UI"/>
                         </a:rPr>
-                        <a:t>Fleet Book %: 37.2%</a:t>
+                        <a:t>Fleet Book %: 46.2%</a:t>
                       </a:r>
                     </a:p>
                   </a:txBody>
@@ -3803,7 +3803,7 @@
                         <a:rPr sz="900">
                           <a:latin typeface="Segoe UI"/>
                         </a:rPr>
-                        <a:t>Non-Fleet Bound Premium: $181,953.08</a:t>
+                        <a:t>Non-Fleet Bound Premium: $156,502.89</a:t>
                       </a:r>
                     </a:p>
                   </a:txBody>
@@ -3840,7 +3840,7 @@
                         <a:rPr sz="900">
                           <a:latin typeface="Segoe UI"/>
                         </a:rPr>
-                        <a:t>Non-Fleet Book %: 62.8%</a:t>
+                        <a:t>Non-Fleet Book %: 53.8%</a:t>
                       </a:r>
                     </a:p>
                   </a:txBody>
@@ -4707,7 +4707,7 @@
                           </a:solidFill>
                           <a:latin typeface="Segoe UI"/>
                         </a:rPr>
-                        <a:t>12.8%</a:t>
+                        <a:t>15.4%</a:t>
                       </a:r>
                     </a:p>
                   </a:txBody>
@@ -4983,7 +4983,7 @@
                           </a:solidFill>
                           <a:latin typeface="Segoe UI"/>
                         </a:rPr>
-                        <a:t>5</a:t>
+                        <a:t>6</a:t>
                       </a:r>
                     </a:p>
                   </a:txBody>
@@ -5262,7 +5262,7 @@
                           </a:solidFill>
                           <a:latin typeface="Segoe UI"/>
                         </a:rPr>
-                        <a:t>$81.2K</a:t>
+                        <a:t>$82.3K</a:t>
                       </a:r>
                     </a:p>
                   </a:txBody>

--- a/generated/Tier 1 Broker Scorecards/Partlow Insurance Agency Inc_Broker_Scorecard.pptx
+++ b/generated/Tier 1 Broker Scorecards/Partlow Insurance Agency Inc_Broker_Scorecard.pptx
@@ -3357,7 +3357,7 @@
                         <a:rPr sz="800">
                           <a:latin typeface="Segoe UI"/>
                         </a:rPr>
-                        <a:t>$842,178.38 / $832,920.03 / $290,652.53</a:t>
+                        <a:t>$842,178.38 / $851,530.56 / $309,263.06</a:t>
                       </a:r>
                     </a:p>
                   </a:txBody>
@@ -3394,7 +3394,7 @@
                         <a:rPr sz="900">
                           <a:latin typeface="Segoe UI"/>
                         </a:rPr>
-                        <a:t>Tier 1  |  7.36% / 15.00%</a:t>
+                        <a:t>Tier 1  |  7.83% / 15.00%</a:t>
                       </a:r>
                     </a:p>
                   </a:txBody>
@@ -3431,7 +3431,7 @@
                         <a:rPr sz="900">
                           <a:latin typeface="Segoe UI"/>
                         </a:rPr>
-                        <a:t>$1,179,049.73  (24.7% achieved)</a:t>
+                        <a:t>$1,179,049.73  (26.2% achieved)</a:t>
                       </a:r>
                     </a:p>
                   </a:txBody>
@@ -3690,7 +3690,7 @@
                         <a:rPr sz="900">
                           <a:latin typeface="Segoe UI"/>
                         </a:rPr>
-                        <a:t>Fleet Bound Premium: $134,149.64</a:t>
+                        <a:t>Fleet Bound Premium: $137,494.77</a:t>
                       </a:r>
                     </a:p>
                   </a:txBody>
@@ -3727,7 +3727,7 @@
                         <a:rPr sz="900">
                           <a:latin typeface="Segoe UI"/>
                         </a:rPr>
-                        <a:t>Fleet Book %: 46.2%</a:t>
+                        <a:t>Fleet Book %: 44.5%</a:t>
                       </a:r>
                     </a:p>
                   </a:txBody>
@@ -3766,7 +3766,7 @@
                         <a:rPr sz="900">
                           <a:latin typeface="Segoe UI"/>
                         </a:rPr>
-                        <a:t>Non-Fleet Subs: 150  |  Binds: 9</a:t>
+                        <a:t>Non-Fleet Subs: 153  |  Binds: 10</a:t>
                       </a:r>
                     </a:p>
                   </a:txBody>
@@ -3803,7 +3803,7 @@
                         <a:rPr sz="900">
                           <a:latin typeface="Segoe UI"/>
                         </a:rPr>
-                        <a:t>Non-Fleet Bound Premium: $156,502.89</a:t>
+                        <a:t>Non-Fleet Bound Premium: $171,768.29</a:t>
                       </a:r>
                     </a:p>
                   </a:txBody>
@@ -3840,7 +3840,7 @@
                         <a:rPr sz="900">
                           <a:latin typeface="Segoe UI"/>
                         </a:rPr>
-                        <a:t>Non-Fleet Book %: 53.8%</a:t>
+                        <a:t>Non-Fleet Book %: 55.5%</a:t>
                       </a:r>
                     </a:p>
                   </a:txBody>
@@ -4428,7 +4428,7 @@
                           </a:solidFill>
                           <a:latin typeface="Segoe UI"/>
                         </a:rPr>
-                        <a:t>39</a:t>
+                        <a:t>42</a:t>
                       </a:r>
                     </a:p>
                   </a:txBody>
@@ -4707,7 +4707,7 @@
                           </a:solidFill>
                           <a:latin typeface="Segoe UI"/>
                         </a:rPr>
-                        <a:t>15.4%</a:t>
+                        <a:t>16.7%</a:t>
                       </a:r>
                     </a:p>
                   </a:txBody>
@@ -4983,7 +4983,7 @@
                           </a:solidFill>
                           <a:latin typeface="Segoe UI"/>
                         </a:rPr>
-                        <a:t>6</a:t>
+                        <a:t>7</a:t>
                       </a:r>
                     </a:p>
                   </a:txBody>
@@ -5262,7 +5262,7 @@
                           </a:solidFill>
                           <a:latin typeface="Segoe UI"/>
                         </a:rPr>
-                        <a:t>$82.3K</a:t>
+                        <a:t>$100.9K</a:t>
                       </a:r>
                     </a:p>
                   </a:txBody>

--- a/generated/Tier 1 Broker Scorecards/Partlow Insurance Agency Inc_Broker_Scorecard.pptx
+++ b/generated/Tier 1 Broker Scorecards/Partlow Insurance Agency Inc_Broker_Scorecard.pptx
@@ -3394,7 +3394,7 @@
                         <a:rPr sz="900">
                           <a:latin typeface="Segoe UI"/>
                         </a:rPr>
-                        <a:t>Tier 1  |  7.83% / 15.00%</a:t>
+                        <a:t>Tier 1  |  7.69% / 15.00%</a:t>
                       </a:r>
                     </a:p>
                   </a:txBody>
@@ -3690,7 +3690,7 @@
                         <a:rPr sz="900">
                           <a:latin typeface="Segoe UI"/>
                         </a:rPr>
-                        <a:t>Fleet Bound Premium: $137,494.77</a:t>
+                        <a:t>Fleet Bound Premium: $137,431.79</a:t>
                       </a:r>
                     </a:p>
                   </a:txBody>
@@ -3727,7 +3727,7 @@
                         <a:rPr sz="900">
                           <a:latin typeface="Segoe UI"/>
                         </a:rPr>
-                        <a:t>Fleet Book %: 44.5%</a:t>
+                        <a:t>Fleet Book %: 44.4%</a:t>
                       </a:r>
                     </a:p>
                   </a:txBody>
@@ -3766,7 +3766,7 @@
                         <a:rPr sz="900">
                           <a:latin typeface="Segoe UI"/>
                         </a:rPr>
-                        <a:t>Non-Fleet Subs: 153  |  Binds: 10</a:t>
+                        <a:t>Non-Fleet Subs: 156  |  Binds: 10</a:t>
                       </a:r>
                     </a:p>
                   </a:txBody>
@@ -3803,7 +3803,7 @@
                         <a:rPr sz="900">
                           <a:latin typeface="Segoe UI"/>
                         </a:rPr>
-                        <a:t>Non-Fleet Bound Premium: $171,768.29</a:t>
+                        <a:t>Non-Fleet Bound Premium: $171,831.27</a:t>
                       </a:r>
                     </a:p>
                   </a:txBody>
@@ -3840,7 +3840,7 @@
                         <a:rPr sz="900">
                           <a:latin typeface="Segoe UI"/>
                         </a:rPr>
-                        <a:t>Non-Fleet Book %: 55.5%</a:t>
+                        <a:t>Non-Fleet Book %: 55.6%</a:t>
                       </a:r>
                     </a:p>
                   </a:txBody>
@@ -4424,11 +4424,11 @@
                       <a:r>
                         <a:rPr sz="800">
                           <a:solidFill>
-                            <a:srgbClr val="DC2626"/>
+                            <a:srgbClr val="059669"/>
                           </a:solidFill>
                           <a:latin typeface="Segoe UI"/>
                         </a:rPr>
-                        <a:t>42</a:t>
+                        <a:t>45</a:t>
                       </a:r>
                     </a:p>
                   </a:txBody>
@@ -4707,7 +4707,7 @@
                           </a:solidFill>
                           <a:latin typeface="Segoe UI"/>
                         </a:rPr>
-                        <a:t>16.7%</a:t>
+                        <a:t>15.6%</a:t>
                       </a:r>
                     </a:p>
                   </a:txBody>

--- a/generated/Tier 1 Broker Scorecards/Partlow Insurance Agency Inc_Broker_Scorecard.pptx
+++ b/generated/Tier 1 Broker Scorecards/Partlow Insurance Agency Inc_Broker_Scorecard.pptx
@@ -3357,7 +3357,7 @@
                         <a:rPr sz="800">
                           <a:latin typeface="Segoe UI"/>
                         </a:rPr>
-                        <a:t>$842,178.38 / $851,530.56 / $309,263.06</a:t>
+                        <a:t>$842,178.38 / $875,015.68 / $332,748.18</a:t>
                       </a:r>
                     </a:p>
                   </a:txBody>
@@ -3394,7 +3394,7 @@
                         <a:rPr sz="900">
                           <a:latin typeface="Segoe UI"/>
                         </a:rPr>
-                        <a:t>Tier 1  |  7.69% / 15.00%</a:t>
+                        <a:t>Tier 1  |  8.82% / 15.00%</a:t>
                       </a:r>
                     </a:p>
                   </a:txBody>
@@ -3431,7 +3431,7 @@
                         <a:rPr sz="900">
                           <a:latin typeface="Segoe UI"/>
                         </a:rPr>
-                        <a:t>$1,179,049.73  (26.2% achieved)</a:t>
+                        <a:t>$1,179,049.73  (28.2% achieved)</a:t>
                       </a:r>
                     </a:p>
                   </a:txBody>
@@ -3690,7 +3690,7 @@
                         <a:rPr sz="900">
                           <a:latin typeface="Segoe UI"/>
                         </a:rPr>
-                        <a:t>Fleet Bound Premium: $137,431.79</a:t>
+                        <a:t>Fleet Bound Premium: $141,031.68</a:t>
                       </a:r>
                     </a:p>
                   </a:txBody>
@@ -3727,7 +3727,7 @@
                         <a:rPr sz="900">
                           <a:latin typeface="Segoe UI"/>
                         </a:rPr>
-                        <a:t>Fleet Book %: 44.4%</a:t>
+                        <a:t>Fleet Book %: 42.4%</a:t>
                       </a:r>
                     </a:p>
                   </a:txBody>
@@ -3766,7 +3766,7 @@
                         <a:rPr sz="900">
                           <a:latin typeface="Segoe UI"/>
                         </a:rPr>
-                        <a:t>Non-Fleet Subs: 156  |  Binds: 10</a:t>
+                        <a:t>Non-Fleet Subs: 157  |  Binds: 12</a:t>
                       </a:r>
                     </a:p>
                   </a:txBody>
@@ -3803,7 +3803,7 @@
                         <a:rPr sz="900">
                           <a:latin typeface="Segoe UI"/>
                         </a:rPr>
-                        <a:t>Non-Fleet Bound Premium: $171,831.27</a:t>
+                        <a:t>Non-Fleet Bound Premium: $191,716.50</a:t>
                       </a:r>
                     </a:p>
                   </a:txBody>
@@ -3840,7 +3840,7 @@
                         <a:rPr sz="900">
                           <a:latin typeface="Segoe UI"/>
                         </a:rPr>
-                        <a:t>Non-Fleet Book %: 55.6%</a:t>
+                        <a:t>Non-Fleet Book %: 57.6%</a:t>
                       </a:r>
                     </a:p>
                   </a:txBody>
@@ -4428,7 +4428,7 @@
                           </a:solidFill>
                           <a:latin typeface="Segoe UI"/>
                         </a:rPr>
-                        <a:t>45</a:t>
+                        <a:t>46</a:t>
                       </a:r>
                     </a:p>
                   </a:txBody>
@@ -4707,7 +4707,7 @@
                           </a:solidFill>
                           <a:latin typeface="Segoe UI"/>
                         </a:rPr>
-                        <a:t>15.6%</a:t>
+                        <a:t>19.6%</a:t>
                       </a:r>
                     </a:p>
                   </a:txBody>
@@ -4983,7 +4983,7 @@
                           </a:solidFill>
                           <a:latin typeface="Segoe UI"/>
                         </a:rPr>
-                        <a:t>7</a:t>
+                        <a:t>9</a:t>
                       </a:r>
                     </a:p>
                   </a:txBody>
@@ -5262,7 +5262,7 @@
                           </a:solidFill>
                           <a:latin typeface="Segoe UI"/>
                         </a:rPr>
-                        <a:t>$100.9K</a:t>
+                        <a:t>$124.4K</a:t>
                       </a:r>
                     </a:p>
                   </a:txBody>

--- a/generated/Tier 1 Broker Scorecards/Partlow Insurance Agency Inc_Broker_Scorecard.pptx
+++ b/generated/Tier 1 Broker Scorecards/Partlow Insurance Agency Inc_Broker_Scorecard.pptx
@@ -3394,7 +3394,7 @@
                         <a:rPr sz="900">
                           <a:latin typeface="Segoe UI"/>
                         </a:rPr>
-                        <a:t>Tier 1  |  8.82% / 15.00%</a:t>
+                        <a:t>Tier 1  |  8.72% / 15.00%</a:t>
                       </a:r>
                     </a:p>
                   </a:txBody>
@@ -3766,7 +3766,7 @@
                         <a:rPr sz="900">
                           <a:latin typeface="Segoe UI"/>
                         </a:rPr>
-                        <a:t>Non-Fleet Subs: 157  |  Binds: 12</a:t>
+                        <a:t>Non-Fleet Subs: 159  |  Binds: 12</a:t>
                       </a:r>
                     </a:p>
                   </a:txBody>
@@ -4428,7 +4428,7 @@
                           </a:solidFill>
                           <a:latin typeface="Segoe UI"/>
                         </a:rPr>
-                        <a:t>46</a:t>
+                        <a:t>48</a:t>
                       </a:r>
                     </a:p>
                   </a:txBody>
@@ -4707,7 +4707,7 @@
                           </a:solidFill>
                           <a:latin typeface="Segoe UI"/>
                         </a:rPr>
-                        <a:t>19.6%</a:t>
+                        <a:t>18.8%</a:t>
                       </a:r>
                     </a:p>
                   </a:txBody>

--- a/generated/Tier 1 Broker Scorecards/Partlow Insurance Agency Inc_Broker_Scorecard.pptx
+++ b/generated/Tier 1 Broker Scorecards/Partlow Insurance Agency Inc_Broker_Scorecard.pptx
@@ -3357,7 +3357,7 @@
                         <a:rPr sz="800">
                           <a:latin typeface="Segoe UI"/>
                         </a:rPr>
-                        <a:t>$842,178.38 / $875,015.68 / $332,748.18</a:t>
+                        <a:t>$842,178.38 / $803,768.09 / $332,748.18</a:t>
                       </a:r>
                     </a:p>
                   </a:txBody>
@@ -3394,7 +3394,7 @@
                         <a:rPr sz="900">
                           <a:latin typeface="Segoe UI"/>
                         </a:rPr>
-                        <a:t>Tier 1  |  8.72% / 15.00%</a:t>
+                        <a:t>Tier 1  |  8.67% / 15.00%</a:t>
                       </a:r>
                     </a:p>
                   </a:txBody>
@@ -3766,7 +3766,7 @@
                         <a:rPr sz="900">
                           <a:latin typeface="Segoe UI"/>
                         </a:rPr>
-                        <a:t>Non-Fleet Subs: 159  |  Binds: 12</a:t>
+                        <a:t>Non-Fleet Subs: 160  |  Binds: 12</a:t>
                       </a:r>
                     </a:p>
                   </a:txBody>
@@ -4428,7 +4428,7 @@
                           </a:solidFill>
                           <a:latin typeface="Segoe UI"/>
                         </a:rPr>
-                        <a:t>48</a:t>
+                        <a:t>49</a:t>
                       </a:r>
                     </a:p>
                   </a:txBody>
@@ -4707,7 +4707,7 @@
                           </a:solidFill>
                           <a:latin typeface="Segoe UI"/>
                         </a:rPr>
-                        <a:t>18.8%</a:t>
+                        <a:t>18.4%</a:t>
                       </a:r>
                     </a:p>
                   </a:txBody>
